--- a/Fire Eggプレゼンボードpptx.pptx
+++ b/Fire Eggプレゼンボードpptx.pptx
@@ -243,7 +243,7 @@
           <a:p>
             <a:fld id="{577333C2-B442-4E67-B7E1-E61334DFF996}" type="datetimeFigureOut">
               <a:rPr kumimoji="1" lang="ja-JP" altLang="en-US" smtClean="0"/>
-              <a:t>2026/1/29</a:t>
+              <a:t>2026/1/30</a:t>
             </a:fld>
             <a:endParaRPr kumimoji="1" lang="ja-JP" altLang="en-US"/>
           </a:p>
@@ -445,7 +445,7 @@
           <a:p>
             <a:fld id="{577333C2-B442-4E67-B7E1-E61334DFF996}" type="datetimeFigureOut">
               <a:rPr kumimoji="1" lang="ja-JP" altLang="en-US" smtClean="0"/>
-              <a:t>2026/1/29</a:t>
+              <a:t>2026/1/30</a:t>
             </a:fld>
             <a:endParaRPr kumimoji="1" lang="ja-JP" altLang="en-US"/>
           </a:p>
@@ -657,7 +657,7 @@
           <a:p>
             <a:fld id="{577333C2-B442-4E67-B7E1-E61334DFF996}" type="datetimeFigureOut">
               <a:rPr kumimoji="1" lang="ja-JP" altLang="en-US" smtClean="0"/>
-              <a:t>2026/1/29</a:t>
+              <a:t>2026/1/30</a:t>
             </a:fld>
             <a:endParaRPr kumimoji="1" lang="ja-JP" altLang="en-US"/>
           </a:p>
@@ -859,7 +859,7 @@
           <a:p>
             <a:fld id="{577333C2-B442-4E67-B7E1-E61334DFF996}" type="datetimeFigureOut">
               <a:rPr kumimoji="1" lang="ja-JP" altLang="en-US" smtClean="0"/>
-              <a:t>2026/1/29</a:t>
+              <a:t>2026/1/30</a:t>
             </a:fld>
             <a:endParaRPr kumimoji="1" lang="ja-JP" altLang="en-US"/>
           </a:p>
@@ -1105,7 +1105,7 @@
           <a:p>
             <a:fld id="{577333C2-B442-4E67-B7E1-E61334DFF996}" type="datetimeFigureOut">
               <a:rPr kumimoji="1" lang="ja-JP" altLang="en-US" smtClean="0"/>
-              <a:t>2026/1/29</a:t>
+              <a:t>2026/1/30</a:t>
             </a:fld>
             <a:endParaRPr kumimoji="1" lang="ja-JP" altLang="en-US"/>
           </a:p>
@@ -1401,7 +1401,7 @@
           <a:p>
             <a:fld id="{577333C2-B442-4E67-B7E1-E61334DFF996}" type="datetimeFigureOut">
               <a:rPr kumimoji="1" lang="ja-JP" altLang="en-US" smtClean="0"/>
-              <a:t>2026/1/29</a:t>
+              <a:t>2026/1/30</a:t>
             </a:fld>
             <a:endParaRPr kumimoji="1" lang="ja-JP" altLang="en-US"/>
           </a:p>
@@ -1832,7 +1832,7 @@
           <a:p>
             <a:fld id="{577333C2-B442-4E67-B7E1-E61334DFF996}" type="datetimeFigureOut">
               <a:rPr kumimoji="1" lang="ja-JP" altLang="en-US" smtClean="0"/>
-              <a:t>2026/1/29</a:t>
+              <a:t>2026/1/30</a:t>
             </a:fld>
             <a:endParaRPr kumimoji="1" lang="ja-JP" altLang="en-US"/>
           </a:p>
@@ -1950,7 +1950,7 @@
           <a:p>
             <a:fld id="{577333C2-B442-4E67-B7E1-E61334DFF996}" type="datetimeFigureOut">
               <a:rPr kumimoji="1" lang="ja-JP" altLang="en-US" smtClean="0"/>
-              <a:t>2026/1/29</a:t>
+              <a:t>2026/1/30</a:t>
             </a:fld>
             <a:endParaRPr kumimoji="1" lang="ja-JP" altLang="en-US"/>
           </a:p>
@@ -2045,7 +2045,7 @@
           <a:p>
             <a:fld id="{577333C2-B442-4E67-B7E1-E61334DFF996}" type="datetimeFigureOut">
               <a:rPr kumimoji="1" lang="ja-JP" altLang="en-US" smtClean="0"/>
-              <a:t>2026/1/29</a:t>
+              <a:t>2026/1/30</a:t>
             </a:fld>
             <a:endParaRPr kumimoji="1" lang="ja-JP" altLang="en-US"/>
           </a:p>
@@ -2354,7 +2354,7 @@
           <a:p>
             <a:fld id="{577333C2-B442-4E67-B7E1-E61334DFF996}" type="datetimeFigureOut">
               <a:rPr kumimoji="1" lang="ja-JP" altLang="en-US" smtClean="0"/>
-              <a:t>2026/1/29</a:t>
+              <a:t>2026/1/30</a:t>
             </a:fld>
             <a:endParaRPr kumimoji="1" lang="ja-JP" altLang="en-US"/>
           </a:p>
@@ -2607,7 +2607,7 @@
           <a:p>
             <a:fld id="{577333C2-B442-4E67-B7E1-E61334DFF996}" type="datetimeFigureOut">
               <a:rPr kumimoji="1" lang="ja-JP" altLang="en-US" smtClean="0"/>
-              <a:t>2026/1/29</a:t>
+              <a:t>2026/1/30</a:t>
             </a:fld>
             <a:endParaRPr kumimoji="1" lang="ja-JP" altLang="en-US"/>
           </a:p>
@@ -2852,7 +2852,7 @@
           <a:p>
             <a:fld id="{577333C2-B442-4E67-B7E1-E61334DFF996}" type="datetimeFigureOut">
               <a:rPr kumimoji="1" lang="ja-JP" altLang="en-US" smtClean="0"/>
-              <a:t>2026/1/29</a:t>
+              <a:t>2026/1/30</a:t>
             </a:fld>
             <a:endParaRPr kumimoji="1" lang="ja-JP" altLang="en-US"/>
           </a:p>
@@ -3272,7 +3272,7 @@
             <a:avLst/>
           </a:prstGeom>
           <a:solidFill>
-            <a:srgbClr val="00B0F0"/>
+            <a:schemeClr val="bg1"/>
           </a:solidFill>
           <a:ln w="28575">
             <a:solidFill>
@@ -3427,7 +3427,7 @@
             <a:avLst/>
           </a:prstGeom>
           <a:solidFill>
-            <a:srgbClr val="F2F2F2"/>
+            <a:schemeClr val="bg1"/>
           </a:solidFill>
           <a:ln w="28575">
             <a:solidFill>
@@ -3468,16 +3468,14 @@
         </p:nvSpPr>
         <p:spPr>
           <a:xfrm>
-            <a:off x="448056" y="510025"/>
-            <a:ext cx="5141974" cy="1517857"/>
+            <a:off x="498506" y="615481"/>
+            <a:ext cx="5141974" cy="973683"/>
           </a:xfrm>
           <a:prstGeom prst="rect">
             <a:avLst/>
           </a:prstGeom>
           <a:solidFill>
-            <a:schemeClr val="bg1">
-              <a:lumMod val="95000"/>
-            </a:schemeClr>
+            <a:schemeClr val="bg1"/>
           </a:solidFill>
           <a:ln>
             <a:noFill/>
@@ -3573,12 +3571,13 @@
             <a:avLst/>
           </a:prstGeom>
           <a:solidFill>
-            <a:schemeClr val="accent3">
-              <a:lumMod val="60000"/>
-              <a:lumOff val="40000"/>
-            </a:schemeClr>
+            <a:schemeClr val="bg1"/>
           </a:solidFill>
-          <a:ln w="28575"/>
+          <a:ln w="28575">
+            <a:solidFill>
+              <a:schemeClr val="tx1"/>
+            </a:solidFill>
+          </a:ln>
         </p:spPr>
         <p:style>
           <a:lnRef idx="2">
@@ -3662,7 +3661,7 @@
         <p:spPr>
           <a:xfrm>
             <a:off x="344423" y="3657599"/>
-            <a:ext cx="6156960" cy="3044953"/>
+            <a:ext cx="5974396" cy="3044953"/>
           </a:xfrm>
           <a:prstGeom prst="rect">
             <a:avLst/>
@@ -3699,9 +3698,69 @@
           </a:p>
         </p:txBody>
       </p:sp>
+      <p:sp>
+        <p:nvSpPr>
+          <p:cNvPr id="4" name="テキスト ボックス 3"/>
+          <p:cNvSpPr txBox="1"/>
+          <p:nvPr/>
+        </p:nvSpPr>
+        <p:spPr>
+          <a:xfrm>
+            <a:off x="788276" y="1725324"/>
+            <a:ext cx="2954655" cy="369332"/>
+          </a:xfrm>
+          <a:prstGeom prst="rect">
+            <a:avLst/>
+          </a:prstGeom>
+          <a:noFill/>
+        </p:spPr>
+        <p:txBody>
+          <a:bodyPr wrap="none" rtlCol="0">
+            <a:spAutoFit/>
+          </a:bodyPr>
+          <a:lstStyle/>
+          <a:p>
+            <a:r>
+              <a:rPr kumimoji="1" lang="ja-JP" altLang="en-US" dirty="0" smtClean="0"/>
+              <a:t>情報クリエイタ工学科２年</a:t>
+            </a:r>
+            <a:endParaRPr kumimoji="1" lang="ja-JP" altLang="en-US" dirty="0"/>
+          </a:p>
+        </p:txBody>
+      </p:sp>
+      <p:sp>
+        <p:nvSpPr>
+          <p:cNvPr id="9" name="テキスト ボックス 8"/>
+          <p:cNvSpPr txBox="1"/>
+          <p:nvPr/>
+        </p:nvSpPr>
+        <p:spPr>
+          <a:xfrm>
+            <a:off x="3799687" y="1725680"/>
+            <a:ext cx="1173719" cy="369332"/>
+          </a:xfrm>
+          <a:prstGeom prst="rect">
+            <a:avLst/>
+          </a:prstGeom>
+          <a:noFill/>
+        </p:spPr>
+        <p:txBody>
+          <a:bodyPr wrap="none" rtlCol="0">
+            <a:spAutoFit/>
+          </a:bodyPr>
+          <a:lstStyle/>
+          <a:p>
+            <a:r>
+              <a:rPr kumimoji="1" lang="ja-JP" altLang="en-US" dirty="0" smtClean="0"/>
+              <a:t>石塚 琉生</a:t>
+            </a:r>
+            <a:endParaRPr kumimoji="1" lang="ja-JP" altLang="en-US" dirty="0"/>
+          </a:p>
+        </p:txBody>
+      </p:sp>
       <p:pic>
         <p:nvPicPr>
-          <p:cNvPr id="2" name="図 1"/>
+          <p:cNvPr id="11" name="図 10"/>
           <p:cNvPicPr>
             <a:picLocks noChangeAspect="1"/>
           </p:cNvPicPr>
@@ -3721,8 +3780,8 @@
         </p:blipFill>
         <p:spPr>
           <a:xfrm>
-            <a:off x="7399113" y="2027882"/>
-            <a:ext cx="4062796" cy="2410255"/>
+            <a:off x="7444841" y="1941940"/>
+            <a:ext cx="4157648" cy="2506324"/>
           </a:xfrm>
           <a:prstGeom prst="rect">
             <a:avLst/>

--- a/Fire Eggプレゼンボードpptx.pptx
+++ b/Fire Eggプレゼンボードpptx.pptx
@@ -243,7 +243,7 @@
           <a:p>
             <a:fld id="{577333C2-B442-4E67-B7E1-E61334DFF996}" type="datetimeFigureOut">
               <a:rPr kumimoji="1" lang="ja-JP" altLang="en-US" smtClean="0"/>
-              <a:t>2026/1/30</a:t>
+              <a:t>2026/2/3</a:t>
             </a:fld>
             <a:endParaRPr kumimoji="1" lang="ja-JP" altLang="en-US"/>
           </a:p>
@@ -445,7 +445,7 @@
           <a:p>
             <a:fld id="{577333C2-B442-4E67-B7E1-E61334DFF996}" type="datetimeFigureOut">
               <a:rPr kumimoji="1" lang="ja-JP" altLang="en-US" smtClean="0"/>
-              <a:t>2026/1/30</a:t>
+              <a:t>2026/2/3</a:t>
             </a:fld>
             <a:endParaRPr kumimoji="1" lang="ja-JP" altLang="en-US"/>
           </a:p>
@@ -657,7 +657,7 @@
           <a:p>
             <a:fld id="{577333C2-B442-4E67-B7E1-E61334DFF996}" type="datetimeFigureOut">
               <a:rPr kumimoji="1" lang="ja-JP" altLang="en-US" smtClean="0"/>
-              <a:t>2026/1/30</a:t>
+              <a:t>2026/2/3</a:t>
             </a:fld>
             <a:endParaRPr kumimoji="1" lang="ja-JP" altLang="en-US"/>
           </a:p>
@@ -859,7 +859,7 @@
           <a:p>
             <a:fld id="{577333C2-B442-4E67-B7E1-E61334DFF996}" type="datetimeFigureOut">
               <a:rPr kumimoji="1" lang="ja-JP" altLang="en-US" smtClean="0"/>
-              <a:t>2026/1/30</a:t>
+              <a:t>2026/2/3</a:t>
             </a:fld>
             <a:endParaRPr kumimoji="1" lang="ja-JP" altLang="en-US"/>
           </a:p>
@@ -1105,7 +1105,7 @@
           <a:p>
             <a:fld id="{577333C2-B442-4E67-B7E1-E61334DFF996}" type="datetimeFigureOut">
               <a:rPr kumimoji="1" lang="ja-JP" altLang="en-US" smtClean="0"/>
-              <a:t>2026/1/30</a:t>
+              <a:t>2026/2/3</a:t>
             </a:fld>
             <a:endParaRPr kumimoji="1" lang="ja-JP" altLang="en-US"/>
           </a:p>
@@ -1401,7 +1401,7 @@
           <a:p>
             <a:fld id="{577333C2-B442-4E67-B7E1-E61334DFF996}" type="datetimeFigureOut">
               <a:rPr kumimoji="1" lang="ja-JP" altLang="en-US" smtClean="0"/>
-              <a:t>2026/1/30</a:t>
+              <a:t>2026/2/3</a:t>
             </a:fld>
             <a:endParaRPr kumimoji="1" lang="ja-JP" altLang="en-US"/>
           </a:p>
@@ -1832,7 +1832,7 @@
           <a:p>
             <a:fld id="{577333C2-B442-4E67-B7E1-E61334DFF996}" type="datetimeFigureOut">
               <a:rPr kumimoji="1" lang="ja-JP" altLang="en-US" smtClean="0"/>
-              <a:t>2026/1/30</a:t>
+              <a:t>2026/2/3</a:t>
             </a:fld>
             <a:endParaRPr kumimoji="1" lang="ja-JP" altLang="en-US"/>
           </a:p>
@@ -1950,7 +1950,7 @@
           <a:p>
             <a:fld id="{577333C2-B442-4E67-B7E1-E61334DFF996}" type="datetimeFigureOut">
               <a:rPr kumimoji="1" lang="ja-JP" altLang="en-US" smtClean="0"/>
-              <a:t>2026/1/30</a:t>
+              <a:t>2026/2/3</a:t>
             </a:fld>
             <a:endParaRPr kumimoji="1" lang="ja-JP" altLang="en-US"/>
           </a:p>
@@ -2045,7 +2045,7 @@
           <a:p>
             <a:fld id="{577333C2-B442-4E67-B7E1-E61334DFF996}" type="datetimeFigureOut">
               <a:rPr kumimoji="1" lang="ja-JP" altLang="en-US" smtClean="0"/>
-              <a:t>2026/1/30</a:t>
+              <a:t>2026/2/3</a:t>
             </a:fld>
             <a:endParaRPr kumimoji="1" lang="ja-JP" altLang="en-US"/>
           </a:p>
@@ -2354,7 +2354,7 @@
           <a:p>
             <a:fld id="{577333C2-B442-4E67-B7E1-E61334DFF996}" type="datetimeFigureOut">
               <a:rPr kumimoji="1" lang="ja-JP" altLang="en-US" smtClean="0"/>
-              <a:t>2026/1/30</a:t>
+              <a:t>2026/2/3</a:t>
             </a:fld>
             <a:endParaRPr kumimoji="1" lang="ja-JP" altLang="en-US"/>
           </a:p>
@@ -2607,7 +2607,7 @@
           <a:p>
             <a:fld id="{577333C2-B442-4E67-B7E1-E61334DFF996}" type="datetimeFigureOut">
               <a:rPr kumimoji="1" lang="ja-JP" altLang="en-US" smtClean="0"/>
-              <a:t>2026/1/30</a:t>
+              <a:t>2026/2/3</a:t>
             </a:fld>
             <a:endParaRPr kumimoji="1" lang="ja-JP" altLang="en-US"/>
           </a:p>
@@ -2852,7 +2852,7 @@
           <a:p>
             <a:fld id="{577333C2-B442-4E67-B7E1-E61334DFF996}" type="datetimeFigureOut">
               <a:rPr kumimoji="1" lang="ja-JP" altLang="en-US" smtClean="0"/>
-              <a:t>2026/1/30</a:t>
+              <a:t>2026/2/3</a:t>
             </a:fld>
             <a:endParaRPr kumimoji="1" lang="ja-JP" altLang="en-US"/>
           </a:p>
@@ -3313,8 +3313,8 @@
         </p:nvSpPr>
         <p:spPr>
           <a:xfrm>
-            <a:off x="6833614" y="5502223"/>
-            <a:ext cx="5513833" cy="1200329"/>
+            <a:off x="6851903" y="5180075"/>
+            <a:ext cx="5513833" cy="1754326"/>
           </a:xfrm>
           <a:prstGeom prst="rect">
             <a:avLst/>
@@ -3400,7 +3400,47 @@
                 <a:latin typeface="BIZ UDP明朝 Medium" panose="02020500000000000000" pitchFamily="18" charset="-128"/>
                 <a:ea typeface="BIZ UDP明朝 Medium" panose="02020500000000000000" pitchFamily="18" charset="-128"/>
               </a:rPr>
-              <a:t>：シフトキー</a:t>
+              <a:t>：</a:t>
+            </a:r>
+            <a:r>
+              <a:rPr kumimoji="1" lang="ja-JP" altLang="en-US" dirty="0" smtClean="0">
+                <a:latin typeface="BIZ UDP明朝 Medium" panose="02020500000000000000" pitchFamily="18" charset="-128"/>
+                <a:ea typeface="BIZ UDP明朝 Medium" panose="02020500000000000000" pitchFamily="18" charset="-128"/>
+              </a:rPr>
+              <a:t>シフトキー</a:t>
+            </a:r>
+            <a:endParaRPr kumimoji="1" lang="en-US" altLang="ja-JP" dirty="0" smtClean="0">
+              <a:latin typeface="BIZ UDP明朝 Medium" panose="02020500000000000000" pitchFamily="18" charset="-128"/>
+              <a:ea typeface="BIZ UDP明朝 Medium" panose="02020500000000000000" pitchFamily="18" charset="-128"/>
+            </a:endParaRPr>
+          </a:p>
+          <a:p>
+            <a:endParaRPr lang="en-US" altLang="ja-JP" dirty="0">
+              <a:latin typeface="BIZ UDP明朝 Medium" panose="02020500000000000000" pitchFamily="18" charset="-128"/>
+              <a:ea typeface="BIZ UDP明朝 Medium" panose="02020500000000000000" pitchFamily="18" charset="-128"/>
+            </a:endParaRPr>
+          </a:p>
+          <a:p>
+            <a:r>
+              <a:rPr lang="ja-JP" altLang="en-US" dirty="0" smtClean="0">
+                <a:latin typeface="BIZ UDP明朝 Medium" panose="02020500000000000000" pitchFamily="18" charset="-128"/>
+                <a:ea typeface="BIZ UDP明朝 Medium" panose="02020500000000000000" pitchFamily="18" charset="-128"/>
+              </a:rPr>
+              <a:t>　　　　　　　　　</a:t>
+            </a:r>
+            <a:r>
+              <a:rPr lang="en-US" altLang="ja-JP" dirty="0" smtClean="0">
+                <a:latin typeface="BIZ UDP明朝 Medium" panose="02020500000000000000" pitchFamily="18" charset="-128"/>
+                <a:ea typeface="BIZ UDP明朝 Medium" panose="02020500000000000000" pitchFamily="18" charset="-128"/>
+              </a:rPr>
+              <a:t>TAB</a:t>
+            </a:r>
+            <a:r>
+              <a:rPr lang="ja-JP" altLang="en-US" dirty="0" smtClean="0">
+                <a:latin typeface="BIZ UDP明朝 Medium" panose="02020500000000000000" pitchFamily="18" charset="-128"/>
+                <a:ea typeface="BIZ UDP明朝 Medium" panose="02020500000000000000" pitchFamily="18" charset="-128"/>
+              </a:rPr>
+              <a:t>キー：メニュー</a:t>
             </a:r>
             <a:endParaRPr lang="en-US" altLang="ja-JP" dirty="0">
               <a:latin typeface="BIZ UDP明朝 Medium" panose="02020500000000000000" pitchFamily="18" charset="-128"/>
@@ -3534,7 +3574,7 @@
         </p:nvSpPr>
         <p:spPr>
           <a:xfrm>
-            <a:off x="8136996" y="4754312"/>
+            <a:off x="8136996" y="4625516"/>
             <a:ext cx="2236510" cy="707886"/>
           </a:xfrm>
           <a:prstGeom prst="rect">
